--- a/Docs/PRESENTATION/2. 최종/09285_백준현_AI_Master_최종발표자료_v7.pptx
+++ b/Docs/PRESENTATION/2. 최종/09285_백준현_AI_Master_최종발표자료_v7.pptx
@@ -455,6 +455,16 @@
           </a:p>
           <a:p xmlns:a="http://schemas.openxmlformats.org/drawingml/2006/main">
             <a:r>
+              <a:t>[시간 배분] 개요 2분, 아키텍처 4분, 핵심 기술 과제 4분. 슬라이드를 넘기기 전에 시간을 확인한다.</a:t>
+            </a:r>
+          </a:p>
+          <a:p xmlns:a="http://schemas.openxmlformats.org/drawingml/2006/main">
+            <a:r>
+              <a:t/>
+            </a:r>
+          </a:p>
+          <a:p xmlns:a="http://schemas.openxmlformats.org/drawingml/2006/main">
+            <a:r>
               <a:t>[근거]</a:t>
             </a:r>
           </a:p>
@@ -545,6 +555,21 @@
           </a:p>
           <a:p xmlns:a="http://schemas.openxmlformats.org/drawingml/2006/main">
             <a:r>
+              <a:t>문제를 더 좁히면 이렇습니다. 하나의 업무가 여러 메일과 여러 Thread에 흩어져 도착하고, 기한 변경이나 자료 회신 같은 후속 메일은 표현이 매번 달라집니다. 사용자는 그때마다 과거 메일을 다시 찾아 이 메일이 새 업무인지 기존 업무의 변경인지 판단해야 합니다.</a:t>
+            </a:r>
+          </a:p>
+          <a:p xmlns:a="http://schemas.openxmlformats.org/drawingml/2006/main">
+            <a:r>
+              <a:t>아래 수치는 분모가 서로 다르니 합쳐 읽지 말아 주십시오. 28/28은 회사 LLM Live 15개 Case에서 나온 Action 단계, 3/3은 Task Context Agent 전용 Live, 20/20은 테스트 Gmail의 비식별 합성 메일 수용시험, pytest 179는 코드 회귀입니다. 회사 메일함 전체 정확도가 아닙니다. 체감 시간은 신뢰할 Baseline을 얻지 못해 추정치 대신 미측정으로 적었습니다.</a:t>
+            </a:r>
+          </a:p>
+          <a:p xmlns:a="http://schemas.openxmlformats.org/drawingml/2006/main">
+            <a:r>
+              <a:t/>
+            </a:r>
+          </a:p>
+          <a:p xmlns:a="http://schemas.openxmlformats.org/drawingml/2006/main">
+            <a:r>
               <a:t>[근거]</a:t>
             </a:r>
           </a:p>
@@ -645,6 +670,36 @@
           </a:p>
           <a:p xmlns:a="http://schemas.openxmlformats.org/drawingml/2006/main">
             <a:r>
+              <a:t>가장 중요한 설계 결정부터 말씀드리겠습니다. 모든 메일을 Agent에게 맡기지 않았습니다. 경로가 셋으로 갈립니다. 같은 Thread에 활성 업무가 정확히 하나면 규칙이 바로 연결하고 검색과 Agent 판단을 아예 호출하지 않습니다. 관련 업무를 찾아야 할 때만 RAG 경로로 가고, 업무 요청이 아니면 기존 규칙 경로로 처리합니다. 입력에 따라 호출 자체가 달라지는 것이 고정 Workflow와의 차이입니다.</a:t>
+            </a:r>
+          </a:p>
+          <a:p xmlns:a="http://schemas.openxmlformats.org/drawingml/2006/main">
+            <a:r>
+              <a:t>M-02 검색은 외부 문서가 아니라 제 SQLite를 봅니다. 활성 업무 다섯 건, 각 업무의 최근 메일 세 건과 변경 이력 다섯 건, 그리고 사용자가 과거에 확정한 결정을 함께 가져옵니다. 지난 결정이 다음 판단의 근거로 다시 들어갑니다.</a:t>
+            </a:r>
+          </a:p>
+          <a:p xmlns:a="http://schemas.openxmlformats.org/drawingml/2006/main">
+            <a:r>
+              <a:t>기술 선택 이유입니다. Vector DB와 외부 Embedding은 쓰지 않았습니다. 개인의 활성 업무는 수십 건 규모라 SQLite 조회만으로 충분했고, 구성요소를 늘리는 비용이 더 컸습니다. 대신 검색이 어휘 겹침에 의존한다는 한계가 남습니다. 회사 gpt-4.1-mini는 자유 서술이 아니라 Pydantic Schema로 강제했고, 구조가 깨지면 한 번 재시도한 뒤 실패하면 데이터를 바꾸지 않습니다. 모델 간 비교 실험은 하지 않았으므로 최적이라고 주장하지 않습니다.</a:t>
+            </a:r>
+          </a:p>
+          <a:p xmlns:a="http://schemas.openxmlformats.org/drawingml/2006/main">
+            <a:r>
+              <a:t>세 번째가 이 프로젝트에서 가장 오래 고민한 Python Guard입니다. LLM은 제안만 하고 데이터베이스를 직접 바꾸지 않습니다. Guard는 Agent가 고른 업무 ID가 검색 후보 안에 있는지, 신규 업무인데 기존 ID를 넣지 않았는지, 메일 의도와 Action이 맞는지, 생성에 필요한 값이 있는지를 확인합니다. 하나라도 어긋나면 실행하지 않고 사용자 확인으로 올립니다. 완료, 취소, 기한 단축은 신뢰도와 무관하게 항상 승인을 거치고, 검색이나 모델 호출이 실패하면 조용히 넘어가지 않고 ASK_USER로 닫습니다.</a:t>
+            </a:r>
+          </a:p>
+          <a:p xmlns:a="http://schemas.openxmlformats.org/drawingml/2006/main">
+            <a:r>
+              <a:t>회신도 같은 원칙입니다. 초안이 만들어져도 수신자와 원본 Thread를 잠그고 중복 발송을 막은 뒤, 사용자가 승인한 경우에만 발송하고 실제 Message ID를 확인한 다음에 상태를 바꿉니다.</a:t>
+            </a:r>
+          </a:p>
+          <a:p xmlns:a="http://schemas.openxmlformats.org/drawingml/2006/main">
+            <a:r>
+              <a:t/>
+            </a:r>
+          </a:p>
+          <a:p xmlns:a="http://schemas.openxmlformats.org/drawingml/2006/main">
+            <a:r>
               <a:t>[근거]</a:t>
             </a:r>
           </a:p>
@@ -736,6 +791,36 @@
           <a:p xmlns:a="http://schemas.openxmlformats.org/drawingml/2006/main">
             <a:r>
               <a:t>이 기능들을 일반 Workflow로 구현하는 것이 불가능한 것은 아닙니다. 설계 이유는 모든 표현과 관계를 규칙으로 열거하기 어렵기 때문입니다. 확정 가능한 연결은 규칙으로 처리하고, 다른 Thread와 다른 표현에서는 현재 Mail과 검색 Context를 관찰해 관계와 Action을 제안하도록 제한했습니다. 낮은 신뢰도에서는 검색어를 다시 만들고 결과를 재관찰하며, 그래도 불확실하면 사람이 결정합니다. Reply Agent도 글만 생성하는 것이 아니라 회신 방식과 필요한 입력을 먼저 고릅니다. 실제 Gmail E2E에서는 DATE_REPLY 0.95 판단, 사용자 날짜 입력, LLM 초안, 수신자와 Thread 검증, 승인 발송, WAITING_REPLY 전환을 확인했습니다. 이는 자유로운 장기 계획 Agent가 아니라 결정론적 안전 경로와 제한된 Agent 판단을 결합한 하이브리드입니다.</a:t>
+            </a:r>
+          </a:p>
+          <a:p xmlns:a="http://schemas.openxmlformats.org/drawingml/2006/main">
+            <a:r>
+              <a:t/>
+            </a:r>
+          </a:p>
+          <a:p xmlns:a="http://schemas.openxmlformats.org/drawingml/2006/main">
+            <a:r>
+              <a:t>왜 규칙만으로 부족했는지부터 말씀드리겠습니다. 같은 업무라도 답장이 아니라 새 메일로 오면 Thread가 끊기고 제목과 표현이 바뀝니다. 제목 Token 규칙은 이 경우를 구분하지 못했습니다. 이 차이를 테스트로 고정해 두었습니다. Thread도 다르고 어휘도 겹치지 않는 동일 업무에서 규칙 경로는 사용자 확인으로 멈추고, Agent 경로는 올바른 기존 업무를 찾아 갱신합니다.</a:t>
+            </a:r>
+          </a:p>
+          <a:p xmlns:a="http://schemas.openxmlformats.org/drawingml/2006/main">
+            <a:r>
+              <a:t>세 번째 단계를 봐 주십시오. 관계가 모호하거나 신뢰도가 0.75 미만이면 Agent가 스스로 검색어를 다시 만들어 한 번 더 검색하고 다시 판단합니다. 한 번으로 제한한 이유는 회복 기회는 주되 비용과 지연, 불안정한 자동 변경을 막기 위해서입니다. 참고로 화면의 신뢰도는 모델의 자기보고 값이지 검증된 정답 확률이 아닙니다. 그래서 1.0이어도 중요 변경은 자동 확정하지 않습니다.</a:t>
+            </a:r>
+          </a:p>
+          <a:p xmlns:a="http://schemas.openxmlformats.org/drawingml/2006/main">
+            <a:r>
+              <a:t>실패 경험입니다. 실제 Gmail 신규 요청을 회사 LLM이 수신 메일인데도 회신 대기로 구조화한 적이 있습니다. Python Guard가 관계와 의도 불일치를 잡아 자동 생성을 막고 사용자 확인으로 올렸고, 업무 데이터는 바뀌지 않았습니다. 원인은 메일 방향과 의도의 의미 계약이 충분히 강제되지 않은 것이었고, 이를 재검증하는 재시도를 추가한 뒤 새 Gmail 원본 메일에서 사용자 개입 없이 TASK-010이 생성되는 것과 재조회 35건 전부 중복 차단을 다시 확인했습니다. 안전장치가 먼저 잡아냈다는 점이 핵심입니다.</a:t>
+            </a:r>
+          </a:p>
+          <a:p xmlns:a="http://schemas.openxmlformats.org/drawingml/2006/main">
+            <a:r>
+              <a:t>수치를 읽을 때 주의할 점입니다. 179개는 코드 회귀 범위이고, Live 15/15와 28/28은 제가 정의한 합성 15개 Case에서 출력이 기대 구조와 단계를 충족했다는 뜻입니다. 같은 실행에서 Intent 진단 정확도는 13/15, 86.7퍼센트로 100퍼센트가 아니었고 이 수치도 함께 공개합니다.</a:t>
+            </a:r>
+          </a:p>
+          <a:p xmlns:a="http://schemas.openxmlformats.org/drawingml/2006/main">
+            <a:r>
+              <a:t>마지막으로 하지 않은 선택입니다. 여러 계획을 만들어 비교하는 Tree of Thoughts나 장기 계획 시뮬레이션은 적용하지 않았습니다. 메일 한 건을 업무로 옮기는 판단은 단계가 깊지 않은 대신 틀렸을 때 비용이 업무 데이터 오변경이라, 탐색을 깊게 하기보다 판단은 얕게 하고 결정론적 Guard와 사용자 승인으로 막는 쪽을 택했습니다. 대신 관측과 재검색, 재판단, 실행 후 결과 관찰은 실제로 구현했습니다. Outlook 전환과 사내 인증, 운영 서버는 Post-MVP입니다.</a:t>
             </a:r>
           </a:p>
           <a:p xmlns:a="http://schemas.openxmlformats.org/drawingml/2006/main">
